--- a/0D. SpikAdaptBurst.pptx
+++ b/0D. SpikAdaptBurst.pptx
@@ -124,7 +124,7 @@
 <p1510:revInfo xmlns:a="http://schemas.openxmlformats.org/drawingml/2006/main" xmlns:r="http://schemas.openxmlformats.org/officeDocument/2006/relationships" xmlns:p1510="http://schemas.microsoft.com/office/powerpoint/2015/10/main">
   <p1510:revLst>
     <p1510:client id="{3CF760C2-3403-4A39-888D-D121F39DCDF2}" v="15" dt="2026-03-23T00:35:18.500"/>
-    <p1510:client id="{C3D63829-F4D0-4A66-92DF-54186CA2473C}" v="9" dt="2026-03-23T06:00:02.256"/>
+    <p1510:client id="{C3D63829-F4D0-4A66-92DF-54186CA2473C}" v="11" dt="2026-03-23T18:15:46.048"/>
   </p1510:revLst>
 </p1510:revInfo>
 </file>
@@ -134,7 +134,7 @@
   <pc:docChgLst>
     <pc:chgData name="Nair, Satish" userId="af50c098-07d3-4545-ad93-15c24b849386" providerId="ADAL" clId="{B575728E-D61F-49E0-BC8E-8DC5242C7AE2}"/>
     <pc:docChg chg="undo redo custSel addSld delSld modSld sldOrd">
-      <pc:chgData name="Nair, Satish" userId="af50c098-07d3-4545-ad93-15c24b849386" providerId="ADAL" clId="{B575728E-D61F-49E0-BC8E-8DC5242C7AE2}" dt="2026-03-23T06:00:13.563" v="1254" actId="20577"/>
+      <pc:chgData name="Nair, Satish" userId="af50c098-07d3-4545-ad93-15c24b849386" providerId="ADAL" clId="{B575728E-D61F-49E0-BC8E-8DC5242C7AE2}" dt="2026-03-23T18:15:46.048" v="1259"/>
       <pc:docMkLst>
         <pc:docMk/>
       </pc:docMkLst>
@@ -262,13 +262,13 @@
         </pc:picChg>
       </pc:sldChg>
       <pc:sldChg chg="modSp add mod ord">
-        <pc:chgData name="Nair, Satish" userId="af50c098-07d3-4545-ad93-15c24b849386" providerId="ADAL" clId="{B575728E-D61F-49E0-BC8E-8DC5242C7AE2}" dt="2026-03-23T06:00:02.256" v="1253" actId="1076"/>
+        <pc:chgData name="Nair, Satish" userId="af50c098-07d3-4545-ad93-15c24b849386" providerId="ADAL" clId="{B575728E-D61F-49E0-BC8E-8DC5242C7AE2}" dt="2026-03-23T18:15:46.048" v="1259"/>
         <pc:sldMkLst>
           <pc:docMk/>
           <pc:sldMk cId="2936881161" sldId="264"/>
         </pc:sldMkLst>
         <pc:spChg chg="mod">
-          <ac:chgData name="Nair, Satish" userId="af50c098-07d3-4545-ad93-15c24b849386" providerId="ADAL" clId="{B575728E-D61F-49E0-BC8E-8DC5242C7AE2}" dt="2026-03-23T06:00:02.256" v="1253" actId="1076"/>
+          <ac:chgData name="Nair, Satish" userId="af50c098-07d3-4545-ad93-15c24b849386" providerId="ADAL" clId="{B575728E-D61F-49E0-BC8E-8DC5242C7AE2}" dt="2026-03-23T18:15:46.048" v="1259"/>
           <ac:spMkLst>
             <pc:docMk/>
             <pc:sldMk cId="2936881161" sldId="264"/>
@@ -4091,7 +4091,7 @@
                     <a:ea typeface="Times New Roman" panose="02020603050405020304" pitchFamily="18" charset="0"/>
                     <a:cs typeface="Times New Roman" panose="02020603050405020304" pitchFamily="18" charset="0"/>
                   </a:rPr>
-                  <a:t>C. SPIKING, ADAPTATION, AND BURSTING</a:t>
+                  <a:t>D. SPIKING, ADAPTATION, AND BURSTING</a:t>
                 </a:r>
                 <a:endParaRPr kumimoji="0" lang="en-US" altLang="en-US" sz="2000" b="1" i="0" u="none" strike="noStrike" cap="none" normalizeH="0" baseline="0" dirty="0">
                   <a:ln>
@@ -4157,7 +4157,7 @@
                       <m:sSubPr>
                         <m:ctrlPr>
                           <a:rPr lang="en-US" sz="1700" i="1">
-                            <a:latin typeface="+mn-lt"/>
+                            <a:latin typeface="Cambria Math" panose="02040503050406030204" pitchFamily="18" charset="0"/>
                           </a:rPr>
                         </m:ctrlPr>
                       </m:sSubPr>
@@ -4175,7 +4175,7 @@
                       <m:sub>
                         <m:r>
                           <a:rPr lang="en-US" sz="1700" i="1">
-                            <a:latin typeface="+mn-lt"/>
+                            <a:latin typeface="Cambria Math" panose="02040503050406030204" pitchFamily="18" charset="0"/>
                           </a:rPr>
                           <m:t>1</m:t>
                         </m:r>
@@ -4183,7 +4183,7 @@
                     </m:sSub>
                     <m:r>
                       <a:rPr lang="en-US" sz="1700">
-                        <a:latin typeface="+mn-lt"/>
+                        <a:latin typeface="Cambria Math" panose="02040503050406030204" pitchFamily="18" charset="0"/>
                       </a:rPr>
                       <m:t>/</m:t>
                     </m:r>
@@ -4191,7 +4191,7 @@
                       <m:sSubPr>
                         <m:ctrlPr>
                           <a:rPr lang="en-US" sz="1700" i="1">
-                            <a:latin typeface="+mn-lt"/>
+                            <a:latin typeface="Cambria Math" panose="02040503050406030204" pitchFamily="18" charset="0"/>
                           </a:rPr>
                         </m:ctrlPr>
                       </m:sSubPr>
@@ -4209,7 +4209,7 @@
                       <m:sub>
                         <m:r>
                           <a:rPr lang="en-US" sz="1700" i="1">
-                            <a:latin typeface="+mn-lt"/>
+                            <a:latin typeface="Cambria Math" panose="02040503050406030204" pitchFamily="18" charset="0"/>
                           </a:rPr>
                           <m:t>5</m:t>
                         </m:r>
@@ -4270,12 +4270,18 @@
                   <a:t>: Click on the following link - </a:t>
                 </a:r>
                 <a:r>
-                  <a:rPr lang="en-US" altLang="en-US" sz="1700" dirty="0" err="1">
+                  <a:rPr lang="en-US" u="sng">
+                    <a:hlinkClick r:id="rId2"/>
+                  </a:rPr>
+                  <a:t>Colab_D</a:t>
+                </a:r>
+                <a:r>
+                  <a:rPr lang="en-US" altLang="en-US" sz="1700">
                     <a:latin typeface="+mn-lt"/>
                     <a:ea typeface="Times New Roman" panose="02020603050405020304" pitchFamily="18" charset="0"/>
                     <a:cs typeface="Times New Roman" panose="02020603050405020304" pitchFamily="18" charset="0"/>
                   </a:rPr>
-                  <a:t>Colab_A</a:t>
+                  <a:t> and </a:t>
                 </a:r>
                 <a:r>
                   <a:rPr lang="en-US" altLang="en-US" sz="1700" dirty="0">
@@ -4283,7 +4289,7 @@
                     <a:ea typeface="Times New Roman" panose="02020603050405020304" pitchFamily="18" charset="0"/>
                     <a:cs typeface="Times New Roman" panose="02020603050405020304" pitchFamily="18" charset="0"/>
                   </a:rPr>
-                  <a:t> and complete the sequentially arranged hand-on learning - generating AI prompts for explanations and complete the exercises at the end.</a:t>
+                  <a:t>complete the sequentially arranged hand-on learning - generating AI prompts for explanations and complete the exercises at the end.</a:t>
                 </a:r>
               </a:p>
               <a:p>
@@ -4331,9 +4337,9 @@
                 <a:avLst/>
               </a:prstGeom>
               <a:blipFill>
-                <a:blip r:embed="rId2"/>
+                <a:blip r:embed="rId3"/>
                 <a:stretch>
-                  <a:fillRect l="-392" t="-93" r="-728" b="-929"/>
+                  <a:fillRect l="-392" t="-186" r="-728" b="-929"/>
                 </a:stretch>
               </a:blipFill>
               <a:ln>
